--- a/dist/초5/국어/문학문법매체/초5_국어_문학문법매체_02_자료출처확인_학생용.pptx
+++ b/dist/초5/국어/문학문법매체/초5_국어_문학문법매체_02_자료출처확인_학생용.pptx
@@ -120,13 +120,13 @@
   <p:extLst>
     <p:ext uri="{521415D9-36F7-43E2-AB2F-B90AF26B5E84}">
       <p14:sectionLst xmlns:p14="http://schemas.microsoft.com/office/powerpoint/2010/main">
-        <p14:section name="도입" id="{912d8d34-ab87-aac5-9833-423aea780d5c}">
+        <p14:section name="도입" id="{21e63f23-c985-8016-9b25-f061737c82ea}">
           <p14:sldIdLst>
             <p14:sldId id="256"/>
             <p14:sldId id="257"/>
           </p14:sldIdLst>
         </p14:section>
-        <p14:section name="개념" id="{095154e6-f8ea-3a56-0974-964e21b72a25}">
+        <p14:section name="개념" id="{1fee2118-6ce0-5d23-986d-08e04825daa2}">
           <p14:sldIdLst>
             <p14:sldId id="258"/>
             <p14:sldId id="259"/>
@@ -135,25 +135,25 @@
             <p14:sldId id="262"/>
           </p14:sldIdLst>
         </p14:section>
-        <p14:section name="연습" id="{2bc868ee-37f9-892a-d73c-1998d9198dcf}">
+        <p14:section name="연습" id="{ecc8f78f-6677-6ad7-6b8d-1747104aefe5}">
           <p14:sldIdLst>
             <p14:sldId id="263"/>
             <p14:sldId id="264"/>
             <p14:sldId id="265"/>
           </p14:sldIdLst>
         </p14:section>
-        <p14:section name="확인" id="{b2fe476c-99a4-f405-e727-ae504ab08e98}">
+        <p14:section name="확인" id="{8cb2c50e-e350-588d-17c8-bdec883244c9}">
           <p14:sldIdLst>
             <p14:sldId id="266"/>
             <p14:sldId id="267"/>
           </p14:sldIdLst>
         </p14:section>
-        <p14:section name="정리" id="{316c3460-13be-14d8-bbff-fc1db3316b7a}">
+        <p14:section name="정리" id="{58f18c22-229d-c6b1-772b-bb8d3b024d2b}">
           <p14:sldIdLst>
             <p14:sldId id="268"/>
           </p14:sldIdLst>
         </p14:section>
-        <p14:section name="보충" id="{8a4bd435-101f-996d-e8d5-1b8397ed2bb2}">
+        <p14:section name="보충" id="{cd299a84-c21a-d9e0-a2c1-f8624b7b5cef}">
           <p14:sldIdLst>
             <p14:sldId id="269"/>
           </p14:sldIdLst>
@@ -7745,7 +7745,7 @@
           </p:nvPr>
         </p:nvGraphicFramePr>
         <p:xfrm>
-          <a:off x="608076" y="1878076"/>
+          <a:off x="608076" y="1855216"/>
           <a:ext cx="10972800" cy="914400"/>
         </p:xfrm>
         <a:graphic>
@@ -7757,7 +7757,7 @@
                 <a:gridCol w="4389120"/>
                 <a:gridCol w="4389120"/>
               </a:tblGrid>
-              <a:tr h="472440">
+              <a:tr h="481584">
                 <a:tc>
                   <a:txBody>
                     <a:bodyPr/>
@@ -7952,7 +7952,7 @@
                   </a:tcPr>
                 </a:tc>
               </a:tr>
-              <a:tr h="472440">
+              <a:tr h="481584">
                 <a:tc>
                   <a:txBody>
                     <a:bodyPr/>
@@ -8158,7 +8158,7 @@
                   </a:tcPr>
                 </a:tc>
               </a:tr>
-              <a:tr h="472440">
+              <a:tr h="481584">
                 <a:tc>
                   <a:txBody>
                     <a:bodyPr/>
@@ -8364,7 +8364,7 @@
                   </a:tcPr>
                 </a:tc>
               </a:tr>
-              <a:tr h="472440">
+              <a:tr h="481584">
                 <a:tc>
                   <a:txBody>
                     <a:bodyPr/>
@@ -8570,7 +8570,7 @@
                   </a:tcPr>
                 </a:tc>
               </a:tr>
-              <a:tr h="472440">
+              <a:tr h="481584">
                 <a:tc>
                   <a:txBody>
                     <a:bodyPr/>
